--- a/hwpx-studio-소개.pptx
+++ b/hwpx-studio-소개.pptx
@@ -1615,7 +1615,7 @@
                 <a:ea typeface="KoPub돋움체 Bold" pitchFamily="34" charset="-122"/>
                 <a:cs typeface="KoPub돋움체 Bold" pitchFamily="34" charset="-120"/>
               </a:rPr>
-              <a:t>설치 없이 · 파일이 서버로 가지 않음</a:t>
+              <a:t>설치 없이 · 서버 전송 없음</a:t>
             </a:r>
             <a:endParaRPr lang="en-US" sz="1500" dirty="0"/>
           </a:p>
